--- a/lecons/LSA/Meteorology/15_LSA_MET_L15_Planetary_Winds.pptx
+++ b/lecons/LSA/Meteorology/15_LSA_MET_L15_Planetary_Winds.pptx
@@ -60,11 +60,9 @@
     <p:sldId id="308" r:id="rId54"/>
     <p:sldId id="309" r:id="rId55"/>
     <p:sldId id="310" r:id="rId56"/>
-    <p:sldId id="311" r:id="rId57"/>
-    <p:sldId id="312" r:id="rId58"/>
   </p:sldIdLst>
   <p:notesMasterIdLst>
-    <p:notesMasterId r:id="rId59"/>
+    <p:notesMasterId r:id="rId57"/>
   </p:notesMasterIdLst>
   <p:sldSz cx="12192000" cy="6858000"/>
   <p:notesSz cx="6858000" cy="12192000"/>
@@ -3286,7 +3284,7 @@
           <a:p>
             <a:r>
               <a:rPr lang="en-US" dirty="0"/>
-              <a:t>Let us copy Meaning and Causes of Wind. Winds are caused and deflected as follows. Copy the point on Pressure gradient on the left, then draw the diagram on the right: a windsock. Give it a title and label it clearly.</a:t>
+              <a:t>Let us copy Meaning and Illustration of Planetary Winds. Planetary winds are explained as follows. Copy the point on Pressure gradient on the left, then draw the diagram on the right: a windsock. Give it a title and label it clearly.</a:t>
             </a:r>
             <a:endParaRPr lang="en-US" dirty="0"/>
           </a:p>
@@ -3374,7 +3372,7 @@
           <a:p>
             <a:r>
               <a:rPr lang="en-US" dirty="0"/>
-              <a:t>Copy the point on Coriolis effect (Ferrel's law) on the left, then draw the diagram on the right: the Coriolis effect. Give it a title and label it clearly.</a:t>
+              <a:t>Copy the point on The Coriolis effect (Ferrel's law) on the left, then draw the diagram on the right: the Coriolis effect. Give it a title and label it clearly.</a:t>
             </a:r>
             <a:endParaRPr lang="en-US" dirty="0"/>
           </a:p>
@@ -3550,7 +3548,7 @@
           <a:p>
             <a:r>
               <a:rPr lang="en-US" dirty="0"/>
-              <a:t>We continue with Meaning and Causes of Wind. On this slide we have Naming winds. Write each point on a new line, with the key term first, and explain it in your own words when we revise.</a:t>
+              <a:t>We continue with Meaning and Illustration of Planetary Winds. Copy the point on Naming of winds: write the key term first, then its explanation.</a:t>
             </a:r>
             <a:endParaRPr lang="en-US" dirty="0"/>
           </a:p>
@@ -3638,7 +3636,7 @@
           <a:p>
             <a:r>
               <a:rPr lang="en-US" dirty="0"/>
-              <a:t>Let us copy Types of Planetary Winds. The three planetary winds are the following. Copy the point on Trade winds on the left, then draw the diagram on the right: the planetary winds. Give it a title and label it clearly.</a:t>
+              <a:t>Let us copy Types and Characteristics of Planetary Winds. The three planetary winds have the following characteristics. Copy the point on Trade winds on the left, then draw the diagram on the right: the planetary winds. Give it a title and label it clearly.</a:t>
             </a:r>
             <a:endParaRPr lang="en-US" dirty="0"/>
           </a:p>
@@ -3726,7 +3724,7 @@
           <a:p>
             <a:r>
               <a:rPr lang="en-US" dirty="0"/>
-              <a:t>Copy the point on Characteristics of the trade winds on the left, then draw the diagram on the right: a sailing ship. Give it a title and label it clearly.</a:t>
+              <a:t>Copy the point on Westerlies on the left, then draw the diagram on the right: rough seas. Give it a title and label it clearly.</a:t>
             </a:r>
             <a:endParaRPr lang="en-US" dirty="0"/>
           </a:p>
@@ -3814,7 +3812,7 @@
           <a:p>
             <a:r>
               <a:rPr lang="en-US" dirty="0"/>
-              <a:t>Copy the point on Westerlies on the left, then draw the diagram on the right: stormy seas. Give it a title and label it clearly.</a:t>
+              <a:t>Copy the point on Polar easterlies on the left, then draw the diagram on the right: the three planetary winds. Give it a title and label it clearly.</a:t>
             </a:r>
             <a:endParaRPr lang="en-US" dirty="0"/>
           </a:p>
@@ -3902,7 +3900,7 @@
           <a:p>
             <a:r>
               <a:rPr lang="en-US" dirty="0"/>
-              <a:t>We continue with Types of Planetary Winds. On this slide we have Polar easterlies and Calm belts. Write each point on a new line, with the key term first, and explain it in your own words when we revise.</a:t>
+              <a:t>Now let us check what you have understood. Question 1: Describe the trade winds. Answer in your exercise book.</a:t>
             </a:r>
             <a:endParaRPr lang="en-US" dirty="0"/>
           </a:p>
@@ -3990,7 +3988,7 @@
           <a:p>
             <a:r>
               <a:rPr lang="en-US" dirty="0"/>
-              <a:t>Copy the point on Summary on the left, then draw the diagram on the right: the three planetary winds. Give it a title and label it clearly.</a:t>
+              <a:t>The expected answer is: steady winds blowing from the subtropical highs to the Equator, from the north-east (N. hemisphere) and south-east (S. hemisphere). If you got it right, well done.</a:t>
             </a:r>
             <a:endParaRPr lang="en-US" dirty="0"/>
           </a:p>
@@ -4078,7 +4076,7 @@
           <a:p>
             <a:r>
               <a:rPr lang="en-US" dirty="0"/>
-              <a:t>Now let us check what you have understood. Question 1: Describe the trade winds. Answer in your exercise book.</a:t>
+              <a:t>Now let us check what you have understood. Question 2: Explain the Coriolis effect. Answer in your exercise book.</a:t>
             </a:r>
             <a:endParaRPr lang="en-US" dirty="0"/>
           </a:p>
@@ -4166,7 +4164,7 @@
           <a:p>
             <a:r>
               <a:rPr lang="en-US" dirty="0"/>
-              <a:t>The expected answer is: steady winds blowing from the subtropical highs to the Equator, from the north-east (N. hemisphere) and south-east (S. hemisphere). If you got it right, well done.</a:t>
+              <a:t>The expected answer is: the rotation of the Earth deflects winds to the right in the northern hemisphere and to the left in the southern hemisphere. If you got it right, well done.</a:t>
             </a:r>
             <a:endParaRPr lang="en-US" dirty="0"/>
           </a:p>
@@ -4254,7 +4252,7 @@
           <a:p>
             <a:r>
               <a:rPr lang="en-US" dirty="0"/>
-              <a:t>Now let us check what you have understood. Question 2: Explain the Coriolis effect. Answer in your exercise book.</a:t>
+              <a:t>For those who need more practice, fill in the blanks in your exercise book. The answers are: number 1, low; number 2, westerlies; number 3, doldrums.</a:t>
             </a:r>
             <a:endParaRPr lang="en-US" dirty="0"/>
           </a:p>
@@ -4342,7 +4340,7 @@
           <a:p>
             <a:r>
               <a:rPr lang="en-US" dirty="0"/>
-              <a:t>The expected answer is: the rotation of the Earth deflects winds to the right in the northern hemisphere and to the left in the southern hemisphere. If you got it right, well done.</a:t>
+              <a:t>For your homework: Name the dry wind that blows over Garoua in the dry season. We shall correct it at the beginning of our next lesson.</a:t>
             </a:r>
             <a:endParaRPr lang="en-US" dirty="0"/>
           </a:p>
@@ -4518,7 +4516,7 @@
           <a:p>
             <a:r>
               <a:rPr lang="en-US" dirty="0"/>
-              <a:t>For those who need more practice, fill in the blanks in your exercise book. The answers are: number 1, low; number 2, westerlies; number 3, doldrums.</a:t>
+              <a:t>Our next lesson will be on Lesson 16: Tropical Seasonal Winds: Monsoon and Harmattan. Thank you for your attention, and see you next time.</a:t>
             </a:r>
             <a:endParaRPr lang="en-US" dirty="0"/>
           </a:p>
@@ -4606,7 +4604,7 @@
           <a:p>
             <a:r>
               <a:rPr lang="en-US" dirty="0"/>
-              <a:t>For your homework: Name the dry wind that blows over Garoua in the dry season. We shall correct it at the beginning of our next lesson.</a:t>
+              <a:t>Let us play the bilingual game. I say a word in English, and you give me the French word. Then we do the reverse.</a:t>
             </a:r>
             <a:endParaRPr lang="en-US" dirty="0"/>
           </a:p>
@@ -4694,7 +4692,7 @@
           <a:p>
             <a:r>
               <a:rPr lang="en-US" dirty="0"/>
-              <a:t>Our next lesson will be on Lesson 16: Tropical Seasonal Winds: Monsoon and Harmattan. Thank you for your attention, and see you next time.</a:t>
+              <a:t>I record this information in the official logbook of the class after the lesson.</a:t>
             </a:r>
             <a:endParaRPr lang="en-US" dirty="0"/>
           </a:p>
@@ -4782,7 +4780,7 @@
           <a:p>
             <a:r>
               <a:rPr lang="en-US" dirty="0"/>
-              <a:t>Let us play the bilingual game. I say a word in English, and you give me the French word. Then we do the reverse.</a:t>
+              <a:t>I complete the second page of the logbook: the matter taught, the evaluation, the homework and the attendance.</a:t>
             </a:r>
             <a:endParaRPr lang="en-US" dirty="0"/>
           </a:p>
@@ -4870,7 +4868,7 @@
           <a:p>
             <a:r>
               <a:rPr lang="en-US" dirty="0"/>
-              <a:t>I record this information in the official logbook of the class after the lesson.</a:t>
+              <a:t>This slide is for me, the teacher: it gives the timing of the lesson and what to do if the projector is not available.</a:t>
             </a:r>
             <a:endParaRPr lang="en-US" dirty="0"/>
           </a:p>
@@ -4958,7 +4956,7 @@
           <a:p>
             <a:r>
               <a:rPr lang="en-US" dirty="0"/>
-              <a:t>I complete the second page of the logbook: the matter taught, the evaluation, the homework and the attendance.</a:t>
+              <a:t>These are the references and picture credits used to prepare this lesson.</a:t>
             </a:r>
             <a:endParaRPr lang="en-US" dirty="0"/>
           </a:p>
@@ -4982,182 +4980,6 @@
             <a:fld id="{F7021451-1387-4CA6-816F-3879F97B5CBC}" type="slidenum">
               <a:rPr lang="en-US"/>
               <a:t>55</a:t>
-            </a:fld>
-            <a:endParaRPr lang="en-US"/>
-          </a:p>
-        </p:txBody>
-      </p:sp>
-    </p:spTree>
-    <p:extLst>
-      <p:ext uri="{BB962C8B-B14F-4D97-AF65-F5344CB8AC3E}">
-        <p14:creationId xmlns:p14="http://schemas.microsoft.com/office/powerpoint/2010/main" val="1024086991"/>
-      </p:ext>
-    </p:extLst>
-  </p:cSld>
-  <p:clrMapOvr>
-    <a:masterClrMapping/>
-  </p:clrMapOvr>
-</p:notes>
-</file>
-
-<file path=ppt/notesSlides/notesSlide56.xml><?xml version="1.0" encoding="utf-8"?>
-<p:notes xmlns:a="http://schemas.openxmlformats.org/drawingml/2006/main" xmlns:r="http://schemas.openxmlformats.org/officeDocument/2006/relationships" xmlns:p="http://schemas.openxmlformats.org/presentationml/2006/main">
-  <p:cSld>
-    <p:spTree>
-      <p:nvGrpSpPr>
-        <p:cNvPr id="1" name=""/>
-        <p:cNvGrpSpPr/>
-        <p:nvPr/>
-      </p:nvGrpSpPr>
-      <p:grpSpPr>
-        <a:xfrm>
-          <a:off x="0" y="0"/>
-          <a:ext cx="0" cy="0"/>
-          <a:chOff x="0" y="0"/>
-          <a:chExt cx="0" cy="0"/>
-        </a:xfrm>
-      </p:grpSpPr>
-      <p:sp>
-        <p:nvSpPr>
-          <p:cNvPr id="2" name="Slide Image Placeholder 1"/>
-          <p:cNvSpPr>
-            <a:spLocks noGrp="1" noRot="1" noChangeAspect="1"/>
-          </p:cNvSpPr>
-          <p:nvPr>
-            <p:ph type="sldImg"/>
-          </p:nvPr>
-        </p:nvSpPr>
-        <p:spPr/>
-      </p:sp>
-      <p:sp>
-        <p:nvSpPr>
-          <p:cNvPr id="3" name="Notes Placeholder 2"/>
-          <p:cNvSpPr>
-            <a:spLocks noGrp="1"/>
-          </p:cNvSpPr>
-          <p:nvPr>
-            <p:ph type="body" idx="1"/>
-          </p:nvPr>
-        </p:nvSpPr>
-        <p:spPr/>
-        <p:txBody>
-          <a:bodyPr/>
-          <a:lstStyle/>
-          <a:p>
-            <a:r>
-              <a:rPr lang="en-US" dirty="0"/>
-              <a:t>This slide is for me, the teacher: it gives the timing of the lesson and what to do if the projector is not available.</a:t>
-            </a:r>
-            <a:endParaRPr lang="en-US" dirty="0"/>
-          </a:p>
-        </p:txBody>
-      </p:sp>
-      <p:sp>
-        <p:nvSpPr>
-          <p:cNvPr id="4" name="Slide Number Placeholder 3"/>
-          <p:cNvSpPr>
-            <a:spLocks noGrp="1"/>
-          </p:cNvSpPr>
-          <p:nvPr>
-            <p:ph type="sldNum" sz="quarter" idx="10"/>
-          </p:nvPr>
-        </p:nvSpPr>
-        <p:spPr/>
-        <p:txBody>
-          <a:bodyPr/>
-          <a:lstStyle/>
-          <a:p>
-            <a:fld id="{F7021451-1387-4CA6-816F-3879F97B5CBC}" type="slidenum">
-              <a:rPr lang="en-US"/>
-              <a:t>56</a:t>
-            </a:fld>
-            <a:endParaRPr lang="en-US"/>
-          </a:p>
-        </p:txBody>
-      </p:sp>
-    </p:spTree>
-    <p:extLst>
-      <p:ext uri="{BB962C8B-B14F-4D97-AF65-F5344CB8AC3E}">
-        <p14:creationId xmlns:p14="http://schemas.microsoft.com/office/powerpoint/2010/main" val="1024086991"/>
-      </p:ext>
-    </p:extLst>
-  </p:cSld>
-  <p:clrMapOvr>
-    <a:masterClrMapping/>
-  </p:clrMapOvr>
-</p:notes>
-</file>
-
-<file path=ppt/notesSlides/notesSlide57.xml><?xml version="1.0" encoding="utf-8"?>
-<p:notes xmlns:a="http://schemas.openxmlformats.org/drawingml/2006/main" xmlns:r="http://schemas.openxmlformats.org/officeDocument/2006/relationships" xmlns:p="http://schemas.openxmlformats.org/presentationml/2006/main">
-  <p:cSld>
-    <p:spTree>
-      <p:nvGrpSpPr>
-        <p:cNvPr id="1" name=""/>
-        <p:cNvGrpSpPr/>
-        <p:nvPr/>
-      </p:nvGrpSpPr>
-      <p:grpSpPr>
-        <a:xfrm>
-          <a:off x="0" y="0"/>
-          <a:ext cx="0" cy="0"/>
-          <a:chOff x="0" y="0"/>
-          <a:chExt cx="0" cy="0"/>
-        </a:xfrm>
-      </p:grpSpPr>
-      <p:sp>
-        <p:nvSpPr>
-          <p:cNvPr id="2" name="Slide Image Placeholder 1"/>
-          <p:cNvSpPr>
-            <a:spLocks noGrp="1" noRot="1" noChangeAspect="1"/>
-          </p:cNvSpPr>
-          <p:nvPr>
-            <p:ph type="sldImg"/>
-          </p:nvPr>
-        </p:nvSpPr>
-        <p:spPr/>
-      </p:sp>
-      <p:sp>
-        <p:nvSpPr>
-          <p:cNvPr id="3" name="Notes Placeholder 2"/>
-          <p:cNvSpPr>
-            <a:spLocks noGrp="1"/>
-          </p:cNvSpPr>
-          <p:nvPr>
-            <p:ph type="body" idx="1"/>
-          </p:nvPr>
-        </p:nvSpPr>
-        <p:spPr/>
-        <p:txBody>
-          <a:bodyPr/>
-          <a:lstStyle/>
-          <a:p>
-            <a:r>
-              <a:rPr lang="en-US" dirty="0"/>
-              <a:t>These are the references and picture credits used to prepare this lesson.</a:t>
-            </a:r>
-            <a:endParaRPr lang="en-US" dirty="0"/>
-          </a:p>
-        </p:txBody>
-      </p:sp>
-      <p:sp>
-        <p:nvSpPr>
-          <p:cNvPr id="4" name="Slide Number Placeholder 3"/>
-          <p:cNvSpPr>
-            <a:spLocks noGrp="1"/>
-          </p:cNvSpPr>
-          <p:nvPr>
-            <p:ph type="sldNum" sz="quarter" idx="10"/>
-          </p:nvPr>
-        </p:nvSpPr>
-        <p:spPr/>
-        <p:txBody>
-          <a:bodyPr/>
-          <a:lstStyle/>
-          <a:p>
-            <a:fld id="{F7021451-1387-4CA6-816F-3879F97B5CBC}" type="slidenum">
-              <a:rPr lang="en-US"/>
-              <a:t>57</a:t>
             </a:fld>
             <a:endParaRPr lang="en-US"/>
           </a:p>
@@ -14766,7 +14588,7 @@
                 <a:ea typeface="Times New Roman" pitchFamily="34" charset="-122"/>
                 <a:cs typeface="Times New Roman" pitchFamily="34" charset="-120"/>
               </a:rPr>
-              <a:t>1. Meaning and Causes of Wind</a:t>
+              <a:t>1. Meaning and Illustration of Planetary Winds</a:t>
             </a:r>
             <a:endParaRPr lang="en-US" sz="3600" dirty="0"/>
           </a:p>
@@ -14781,7 +14603,7 @@
         <p:spPr>
           <a:xfrm>
             <a:off x="365760" y="1783080"/>
-            <a:ext cx="4846320" cy="4617720"/>
+            <a:ext cx="6035040" cy="4617720"/>
           </a:xfrm>
           <a:prstGeom prst="rect">
             <a:avLst/>
@@ -14800,7 +14622,7 @@
               <a:buNone/>
             </a:pPr>
             <a:r>
-              <a:rPr lang="en-US" sz="3600" i="1" dirty="0">
+              <a:rPr lang="en-US" sz="3200" i="1" dirty="0">
                 <a:solidFill>
                   <a:srgbClr val="111111"/>
                 </a:solidFill>
@@ -14808,9 +14630,9 @@
                 <a:ea typeface="Times New Roman" pitchFamily="34" charset="-122"/>
                 <a:cs typeface="Times New Roman" pitchFamily="34" charset="-120"/>
               </a:rPr>
-              <a:t>Winds are caused and deflected as follows:</a:t>
-            </a:r>
-            <a:endParaRPr lang="en-US" sz="3600" dirty="0"/>
+              <a:t>Planetary winds are explained as follows:</a:t>
+            </a:r>
+            <a:endParaRPr lang="en-US" sz="3200" dirty="0"/>
           </a:p>
           <a:p>
             <a:pPr algn="l" indent="0" marL="0">
@@ -14820,7 +14642,7 @@
               <a:buNone/>
             </a:pPr>
             <a:r>
-              <a:rPr lang="en-US" sz="3600" b="1" dirty="0">
+              <a:rPr lang="en-US" sz="3200" b="1" dirty="0">
                 <a:solidFill>
                   <a:srgbClr val="111111"/>
                 </a:solidFill>
@@ -14837,7 +14659,7 @@
               <a:buNone/>
             </a:pPr>
             <a:r>
-              <a:rPr lang="en-US" sz="3600" dirty="0">
+              <a:rPr lang="en-US" sz="3200" dirty="0">
                 <a:solidFill>
                   <a:srgbClr val="111111"/>
                 </a:solidFill>
@@ -14845,9 +14667,9 @@
                 <a:ea typeface="Times New Roman" pitchFamily="34" charset="-122"/>
                 <a:cs typeface="Times New Roman" pitchFamily="34" charset="-120"/>
               </a:rPr>
-              <a:t>The bigger the difference in pressure, the stronger the wind.</a:t>
-            </a:r>
-            <a:endParaRPr lang="en-US" sz="3600" dirty="0"/>
+              <a:t>Air always moves from high pressure towards low pressure, and the difference of pressure between two places is the pressure gradient. The bigger the difference, the stronger the wind.</a:t>
+            </a:r>
+            <a:endParaRPr lang="en-US" sz="3200" dirty="0"/>
           </a:p>
         </p:txBody>
       </p:sp>
@@ -14867,8 +14689,8 @@
         </p:blipFill>
         <p:spPr>
           <a:xfrm>
-            <a:off x="5349240" y="2071212"/>
-            <a:ext cx="6659575" cy="3693983"/>
+            <a:off x="6537960" y="2400897"/>
+            <a:ext cx="5470855" cy="3034615"/>
           </a:xfrm>
           <a:prstGeom prst="rect">
             <a:avLst/>
@@ -14883,8 +14705,8 @@
         </p:nvSpPr>
         <p:spPr>
           <a:xfrm>
-            <a:off x="5349240" y="6089904"/>
-            <a:ext cx="6659575" cy="347472"/>
+            <a:off x="6537960" y="6089904"/>
+            <a:ext cx="5470855" cy="347472"/>
           </a:xfrm>
           <a:prstGeom prst="rect">
             <a:avLst/>
@@ -15061,7 +14883,7 @@
                 <a:ea typeface="Times New Roman" pitchFamily="34" charset="-122"/>
                 <a:cs typeface="Times New Roman" pitchFamily="34" charset="-120"/>
               </a:rPr>
-              <a:t>1. Meaning and Causes of Wind</a:t>
+              <a:t>1. Meaning and Illustration of Planetary Winds</a:t>
             </a:r>
             <a:endParaRPr lang="en-US" sz="3600" dirty="0"/>
           </a:p>
@@ -15076,7 +14898,7 @@
         <p:spPr>
           <a:xfrm>
             <a:off x="365760" y="1783080"/>
-            <a:ext cx="4846320" cy="4617720"/>
+            <a:ext cx="6035040" cy="4617720"/>
           </a:xfrm>
           <a:prstGeom prst="rect">
             <a:avLst/>
@@ -15103,7 +14925,7 @@
                 <a:ea typeface="Times New Roman" pitchFamily="34" charset="-122"/>
                 <a:cs typeface="Times New Roman" pitchFamily="34" charset="-120"/>
               </a:rPr>
-              <a:t>Coriolis effect (Ferrel's law): </a:t>
+              <a:t>The Coriolis effect (Ferrel's law): </a:t>
             </a:r>
             <a:pPr algn="l" indent="0" marL="0">
               <a:spcAft>
@@ -15120,7 +14942,7 @@
                 <a:ea typeface="Times New Roman" pitchFamily="34" charset="-122"/>
                 <a:cs typeface="Times New Roman" pitchFamily="34" charset="-120"/>
               </a:rPr>
-              <a:t>The rotation of the Earth deflects winds to the right in the northern hemisphere and to the left in the southern hemisphere.</a:t>
+              <a:t>Because the Earth rotates, winds do not blow straight from high to low pressure. They are deflected to the right in the northern hemisphere and to the left in the southern hemisphere.</a:t>
             </a:r>
             <a:endParaRPr lang="en-US" sz="3600" dirty="0"/>
           </a:p>
@@ -15142,8 +14964,8 @@
         </p:blipFill>
         <p:spPr>
           <a:xfrm>
-            <a:off x="5349240" y="2617506"/>
-            <a:ext cx="6659575" cy="2601397"/>
+            <a:off x="6537960" y="2849678"/>
+            <a:ext cx="5470855" cy="2137053"/>
           </a:xfrm>
           <a:prstGeom prst="rect">
             <a:avLst/>
@@ -15158,8 +14980,8 @@
         </p:nvSpPr>
         <p:spPr>
           <a:xfrm>
-            <a:off x="5349240" y="6089904"/>
-            <a:ext cx="6659575" cy="347472"/>
+            <a:off x="6537960" y="6089904"/>
+            <a:ext cx="5470855" cy="347472"/>
           </a:xfrm>
           <a:prstGeom prst="rect">
             <a:avLst/>
@@ -15599,7 +15421,7 @@
                 <a:ea typeface="Times New Roman" pitchFamily="34" charset="-122"/>
                 <a:cs typeface="Times New Roman" pitchFamily="34" charset="-120"/>
               </a:rPr>
-              <a:t>1. Meaning and Causes of Wind</a:t>
+              <a:t>1. Meaning and Illustration of Planetary Winds</a:t>
             </a:r>
             <a:endParaRPr lang="en-US" sz="3600" dirty="0"/>
           </a:p>
@@ -15641,7 +15463,7 @@
                 <a:ea typeface="Times New Roman" pitchFamily="34" charset="-122"/>
                 <a:cs typeface="Times New Roman" pitchFamily="34" charset="-120"/>
               </a:rPr>
-              <a:t>Naming winds: </a:t>
+              <a:t>Naming of winds: </a:t>
             </a:r>
             <a:pPr algn="l" indent="0" marL="0">
               <a:spcAft>
@@ -15658,7 +15480,7 @@
                 <a:ea typeface="Times New Roman" pitchFamily="34" charset="-122"/>
                 <a:cs typeface="Times New Roman" pitchFamily="34" charset="-120"/>
               </a:rPr>
-              <a:t>A wind is named after the direction it comes from: a north-east wind blows from the north-east.</a:t>
+              <a:t>A wind is named after the direction from which it blows. For example, a north-east wind blows from the north-east towards the south-west.</a:t>
             </a:r>
             <a:endParaRPr lang="en-US" sz="4000" dirty="0"/>
           </a:p>
@@ -15811,7 +15633,7 @@
                 <a:ea typeface="Times New Roman" pitchFamily="34" charset="-122"/>
                 <a:cs typeface="Times New Roman" pitchFamily="34" charset="-120"/>
               </a:rPr>
-              <a:t>2. Types of Planetary Winds</a:t>
+              <a:t>2. Types and Characteristics of Planetary Winds</a:t>
             </a:r>
             <a:endParaRPr lang="en-US" sz="3600" dirty="0"/>
           </a:p>
@@ -15826,7 +15648,7 @@
         <p:spPr>
           <a:xfrm>
             <a:off x="365760" y="1783080"/>
-            <a:ext cx="4846320" cy="4617720"/>
+            <a:ext cx="6035040" cy="4617720"/>
           </a:xfrm>
           <a:prstGeom prst="rect">
             <a:avLst/>
@@ -15845,7 +15667,7 @@
               <a:buNone/>
             </a:pPr>
             <a:r>
-              <a:rPr lang="en-US" sz="3200" i="1" dirty="0">
+              <a:rPr lang="en-US" sz="2600" i="1" dirty="0">
                 <a:solidFill>
                   <a:srgbClr val="111111"/>
                 </a:solidFill>
@@ -15853,9 +15675,9 @@
                 <a:ea typeface="Times New Roman" pitchFamily="34" charset="-122"/>
                 <a:cs typeface="Times New Roman" pitchFamily="34" charset="-120"/>
               </a:rPr>
-              <a:t>The three planetary winds are the following:</a:t>
-            </a:r>
-            <a:endParaRPr lang="en-US" sz="3200" dirty="0"/>
+              <a:t>The three planetary winds have the following characteristics:</a:t>
+            </a:r>
+            <a:endParaRPr lang="en-US" sz="2600" dirty="0"/>
           </a:p>
           <a:p>
             <a:pPr algn="l" indent="0" marL="0">
@@ -15865,7 +15687,7 @@
               <a:buNone/>
             </a:pPr>
             <a:r>
-              <a:rPr lang="en-US" sz="3200" b="1" dirty="0">
+              <a:rPr lang="en-US" sz="2600" b="1" dirty="0">
                 <a:solidFill>
                   <a:srgbClr val="111111"/>
                 </a:solidFill>
@@ -15882,7 +15704,7 @@
               <a:buNone/>
             </a:pPr>
             <a:r>
-              <a:rPr lang="en-US" sz="3200" dirty="0">
+              <a:rPr lang="en-US" sz="2600" dirty="0">
                 <a:solidFill>
                   <a:srgbClr val="111111"/>
                 </a:solidFill>
@@ -15890,9 +15712,9 @@
                 <a:ea typeface="Times New Roman" pitchFamily="34" charset="-122"/>
                 <a:cs typeface="Times New Roman" pitchFamily="34" charset="-120"/>
               </a:rPr>
-              <a:t>They blow from the subtropical highs (30°) to the Equator: from the north-east in the northern hemisphere and from the south-east in the southern hemisphere.</a:t>
-            </a:r>
-            <a:endParaRPr lang="en-US" sz="3200" dirty="0"/>
+              <a:t>They blow from the subtropical highs (30°) towards the equatorial low, from the north-east in the northern hemisphere and from the south-east in the southern hemisphere. They are steady and regular, dry over land like the Harmattan but moist over the oceans, and meet in the calm doldrums at the ITCZ.</a:t>
+            </a:r>
+            <a:endParaRPr lang="en-US" sz="2600" dirty="0"/>
           </a:p>
         </p:txBody>
       </p:sp>
@@ -15912,8 +15734,8 @@
         </p:blipFill>
         <p:spPr>
           <a:xfrm>
-            <a:off x="5349240" y="2617506"/>
-            <a:ext cx="6659575" cy="2601397"/>
+            <a:off x="6537960" y="2849678"/>
+            <a:ext cx="5470855" cy="2137053"/>
           </a:xfrm>
           <a:prstGeom prst="rect">
             <a:avLst/>
@@ -15928,8 +15750,8 @@
         </p:nvSpPr>
         <p:spPr>
           <a:xfrm>
-            <a:off x="5349240" y="6089904"/>
-            <a:ext cx="6659575" cy="347472"/>
+            <a:off x="6537960" y="6089904"/>
+            <a:ext cx="5470855" cy="347472"/>
           </a:xfrm>
           <a:prstGeom prst="rect">
             <a:avLst/>
@@ -16106,7 +15928,7 @@
                 <a:ea typeface="Times New Roman" pitchFamily="34" charset="-122"/>
                 <a:cs typeface="Times New Roman" pitchFamily="34" charset="-120"/>
               </a:rPr>
-              <a:t>2. Types of Planetary Winds</a:t>
+              <a:t>2. Types and Characteristics of Planetary Winds</a:t>
             </a:r>
             <a:endParaRPr lang="en-US" sz="3600" dirty="0"/>
           </a:p>
@@ -16121,7 +15943,7 @@
         <p:spPr>
           <a:xfrm>
             <a:off x="365760" y="1783080"/>
-            <a:ext cx="4846320" cy="4617720"/>
+            <a:ext cx="6035040" cy="4617720"/>
           </a:xfrm>
           <a:prstGeom prst="rect">
             <a:avLst/>
@@ -16140,7 +15962,7 @@
               <a:buNone/>
             </a:pPr>
             <a:r>
-              <a:rPr lang="en-US" sz="3600" b="1" dirty="0">
+              <a:rPr lang="en-US" sz="2800" b="1" dirty="0">
                 <a:solidFill>
                   <a:srgbClr val="111111"/>
                 </a:solidFill>
@@ -16148,7 +15970,7 @@
                 <a:ea typeface="Times New Roman" pitchFamily="34" charset="-122"/>
                 <a:cs typeface="Times New Roman" pitchFamily="34" charset="-120"/>
               </a:rPr>
-              <a:t>Characteristics of the trade winds: </a:t>
+              <a:t>Westerlies: </a:t>
             </a:r>
             <a:pPr algn="l" indent="0" marL="0">
               <a:spcAft>
@@ -16157,7 +15979,7 @@
               <a:buNone/>
             </a:pPr>
             <a:r>
-              <a:rPr lang="en-US" sz="3600" dirty="0">
+              <a:rPr lang="en-US" sz="2800" dirty="0">
                 <a:solidFill>
                   <a:srgbClr val="111111"/>
                 </a:solidFill>
@@ -16165,15 +15987,15 @@
                 <a:ea typeface="Times New Roman" pitchFamily="34" charset="-122"/>
                 <a:cs typeface="Times New Roman" pitchFamily="34" charset="-120"/>
               </a:rPr>
-              <a:t>They are steady and regular, dry over land like the Harmattan and moist over oceans, and meet at the ITCZ.</a:t>
-            </a:r>
-            <a:endParaRPr lang="en-US" sz="3600" dirty="0"/>
+              <a:t>They blow from the subtropical highs towards the subpolar lows (30° to 60°), from the south-west in the northern hemisphere and from the north-west in the southern hemisphere. They are variable, bring depressions and rain to western Europe, and are strongest over the southern oceans, where they are called the Roaring Forties.</a:t>
+            </a:r>
+            <a:endParaRPr lang="en-US" sz="2800" dirty="0"/>
           </a:p>
         </p:txBody>
       </p:sp>
       <p:pic>
         <p:nvPicPr>
-          <p:cNvPr id="5" name="Image 0" descr="/home/claude/f4/img/v2/lsa_ship.jpg">    </p:cNvPr>
+          <p:cNvPr id="5" name="Image 0" descr="/home/claude/f4/img/v2/f4_bigwaves.jpg">    </p:cNvPr>
           <p:cNvPicPr>
             <a:picLocks noChangeAspect="1"/>
           </p:cNvPicPr>
@@ -16187,8 +16009,8 @@
         </p:blipFill>
         <p:spPr>
           <a:xfrm>
-            <a:off x="5349240" y="2110233"/>
-            <a:ext cx="6659575" cy="3615941"/>
+            <a:off x="6537960" y="2400897"/>
+            <a:ext cx="5470855" cy="3034615"/>
           </a:xfrm>
           <a:prstGeom prst="rect">
             <a:avLst/>
@@ -16203,8 +16025,8 @@
         </p:nvSpPr>
         <p:spPr>
           <a:xfrm>
-            <a:off x="5349240" y="6089904"/>
-            <a:ext cx="6659575" cy="347472"/>
+            <a:off x="6537960" y="6089904"/>
+            <a:ext cx="5470855" cy="347472"/>
           </a:xfrm>
           <a:prstGeom prst="rect">
             <a:avLst/>
@@ -16228,7 +16050,7 @@
                 <a:ea typeface="Times New Roman" pitchFamily="34" charset="-122"/>
                 <a:cs typeface="Times New Roman" pitchFamily="34" charset="-120"/>
               </a:rPr>
-              <a:t>Illustration: a sailing ship</a:t>
+              <a:t>Illustration: rough seas</a:t>
             </a:r>
             <a:endParaRPr lang="en-US" sz="1600" dirty="0"/>
           </a:p>
@@ -16381,7 +16203,7 @@
                 <a:ea typeface="Times New Roman" pitchFamily="34" charset="-122"/>
                 <a:cs typeface="Times New Roman" pitchFamily="34" charset="-120"/>
               </a:rPr>
-              <a:t>2. Types of Planetary Winds</a:t>
+              <a:t>2. Types and Characteristics of Planetary Winds</a:t>
             </a:r>
             <a:endParaRPr lang="en-US" sz="3600" dirty="0"/>
           </a:p>
@@ -16396,7 +16218,7 @@
         <p:spPr>
           <a:xfrm>
             <a:off x="365760" y="1783080"/>
-            <a:ext cx="4846320" cy="4617720"/>
+            <a:ext cx="6035040" cy="4617720"/>
           </a:xfrm>
           <a:prstGeom prst="rect">
             <a:avLst/>
@@ -16415,7 +16237,7 @@
               <a:buNone/>
             </a:pPr>
             <a:r>
-              <a:rPr lang="en-US" sz="3200" b="1" dirty="0">
+              <a:rPr lang="en-US" sz="3600" b="1" dirty="0">
                 <a:solidFill>
                   <a:srgbClr val="111111"/>
                 </a:solidFill>
@@ -16423,7 +16245,7 @@
                 <a:ea typeface="Times New Roman" pitchFamily="34" charset="-122"/>
                 <a:cs typeface="Times New Roman" pitchFamily="34" charset="-120"/>
               </a:rPr>
-              <a:t>Westerlies: </a:t>
+              <a:t>Polar easterlies: </a:t>
             </a:r>
             <a:pPr algn="l" indent="0" marL="0">
               <a:spcAft>
@@ -16432,7 +16254,7 @@
               <a:buNone/>
             </a:pPr>
             <a:r>
-              <a:rPr lang="en-US" sz="3200" dirty="0">
+              <a:rPr lang="en-US" sz="3600" dirty="0">
                 <a:solidFill>
                   <a:srgbClr val="111111"/>
                 </a:solidFill>
@@ -16440,15 +16262,15 @@
                 <a:ea typeface="Times New Roman" pitchFamily="34" charset="-122"/>
                 <a:cs typeface="Times New Roman" pitchFamily="34" charset="-120"/>
               </a:rPr>
-              <a:t>They blow from the subtropical highs to the subpolar lows (30°–60°), from the west; they are variable, bring depressions and rain to Europe, and are strongest in the southern hemisphere ("Roaring Forties").</a:t>
-            </a:r>
-            <a:endParaRPr lang="en-US" sz="3200" dirty="0"/>
+              <a:t>They blow from the polar highs towards the subpolar lows (above 60°), from the east. They are very cold, dry and irregular, and where they meet the westerlies the polar front forms.</a:t>
+            </a:r>
+            <a:endParaRPr lang="en-US" sz="3600" dirty="0"/>
           </a:p>
         </p:txBody>
       </p:sp>
       <p:pic>
         <p:nvPicPr>
-          <p:cNvPr id="5" name="Image 0" descr="/home/claude/f4/img/v2/f4_bigwaves.jpg">    </p:cNvPr>
+          <p:cNvPr id="5" name="Image 0" descr="/home/claude/f4/img/v2/met2_winds3.png">    </p:cNvPr>
           <p:cNvPicPr>
             <a:picLocks noChangeAspect="1"/>
           </p:cNvPicPr>
@@ -16462,8 +16284,8 @@
         </p:blipFill>
         <p:spPr>
           <a:xfrm>
-            <a:off x="5349240" y="2071212"/>
-            <a:ext cx="6659575" cy="3693983"/>
+            <a:off x="6537960" y="2849678"/>
+            <a:ext cx="5470855" cy="2137053"/>
           </a:xfrm>
           <a:prstGeom prst="rect">
             <a:avLst/>
@@ -16478,8 +16300,8 @@
         </p:nvSpPr>
         <p:spPr>
           <a:xfrm>
-            <a:off x="5349240" y="6089904"/>
-            <a:ext cx="6659575" cy="347472"/>
+            <a:off x="6537960" y="6089904"/>
+            <a:ext cx="5470855" cy="347472"/>
           </a:xfrm>
           <a:prstGeom prst="rect">
             <a:avLst/>
@@ -16503,7 +16325,7 @@
                 <a:ea typeface="Times New Roman" pitchFamily="34" charset="-122"/>
                 <a:cs typeface="Times New Roman" pitchFamily="34" charset="-120"/>
               </a:rPr>
-              <a:t>Illustration: stormy seas</a:t>
+              <a:t>Illustration: the three planetary winds</a:t>
             </a:r>
             <a:endParaRPr lang="en-US" sz="1600" dirty="0"/>
           </a:p>
@@ -16615,7 +16437,7 @@
                 <a:ea typeface="Calibri" pitchFamily="34" charset="-122"/>
                 <a:cs typeface="Calibri" pitchFamily="34" charset="-120"/>
               </a:rPr>
-              <a:t>BOARD SUMMARY</a:t>
+              <a:t>FORMATIVE EVALUATION</a:t>
             </a:r>
             <a:endParaRPr lang="en-US" sz="1400" dirty="0"/>
           </a:p>
@@ -16638,7 +16460,7 @@
         <p:spPr>
           <a:xfrm>
             <a:off x="0" y="658368"/>
-            <a:ext cx="2468880" cy="5833872"/>
+            <a:ext cx="5120640" cy="5833872"/>
           </a:xfrm>
           <a:prstGeom prst="rect">
             <a:avLst/>
@@ -16653,8 +16475,8 @@
         </p:nvSpPr>
         <p:spPr>
           <a:xfrm>
-            <a:off x="2697480" y="1005840"/>
-            <a:ext cx="9174175" cy="731520"/>
+            <a:off x="5349240" y="1005840"/>
+            <a:ext cx="6522415" cy="731520"/>
           </a:xfrm>
           <a:prstGeom prst="rect">
             <a:avLst/>
@@ -16680,7 +16502,7 @@
                 <a:ea typeface="Times New Roman" pitchFamily="34" charset="-122"/>
                 <a:cs typeface="Times New Roman" pitchFamily="34" charset="-120"/>
               </a:rPr>
-              <a:t>2. Types of Planetary Winds</a:t>
+              <a:t>Evaluation 1</a:t>
             </a:r>
             <a:endParaRPr lang="en-US" sz="3600" dirty="0"/>
           </a:p>
@@ -16694,8 +16516,8 @@
         </p:nvSpPr>
         <p:spPr>
           <a:xfrm>
-            <a:off x="2697480" y="1783080"/>
-            <a:ext cx="9174175" cy="4663440"/>
+            <a:off x="5349240" y="1783080"/>
+            <a:ext cx="6522415" cy="4663440"/>
           </a:xfrm>
           <a:prstGeom prst="rect">
             <a:avLst/>
@@ -16714,7 +16536,7 @@
               <a:buNone/>
             </a:pPr>
             <a:r>
-              <a:rPr lang="en-US" sz="4000" b="1" dirty="0">
+              <a:rPr lang="en-US" sz="4000" dirty="0">
                 <a:solidFill>
                   <a:srgbClr val="111111"/>
                 </a:solidFill>
@@ -16722,61 +16544,7 @@
                 <a:ea typeface="Times New Roman" pitchFamily="34" charset="-122"/>
                 <a:cs typeface="Times New Roman" pitchFamily="34" charset="-120"/>
               </a:rPr>
-              <a:t>Polar easterlies: </a:t>
-            </a:r>
-            <a:pPr algn="l" indent="0" marL="0">
-              <a:spcAft>
-                <a:spcPts val="800"/>
-              </a:spcAft>
-              <a:buNone/>
-            </a:pPr>
-            <a:r>
-              <a:rPr lang="en-US" sz="4000" dirty="0">
-                <a:solidFill>
-                  <a:srgbClr val="111111"/>
-                </a:solidFill>
-                <a:latin typeface="Times New Roman" pitchFamily="34" charset="0"/>
-                <a:ea typeface="Times New Roman" pitchFamily="34" charset="-122"/>
-                <a:cs typeface="Times New Roman" pitchFamily="34" charset="-120"/>
-              </a:rPr>
-              <a:t>They blow from the polar highs to the subpolar lows; they are cold, dry and irregular.</a:t>
-            </a:r>
-            <a:endParaRPr lang="en-US" sz="4000" dirty="0"/>
-          </a:p>
-          <a:p>
-            <a:pPr algn="l" indent="0" marL="0">
-              <a:spcAft>
-                <a:spcPts val="800"/>
-              </a:spcAft>
-              <a:buNone/>
-            </a:pPr>
-            <a:r>
-              <a:rPr lang="en-US" sz="4000" b="1" dirty="0">
-                <a:solidFill>
-                  <a:srgbClr val="111111"/>
-                </a:solidFill>
-                <a:latin typeface="Times New Roman" pitchFamily="34" charset="0"/>
-                <a:ea typeface="Times New Roman" pitchFamily="34" charset="-122"/>
-                <a:cs typeface="Times New Roman" pitchFamily="34" charset="-120"/>
-              </a:rPr>
-              <a:t>Calm belts: </a:t>
-            </a:r>
-            <a:pPr algn="l" indent="0" marL="0">
-              <a:spcAft>
-                <a:spcPts val="800"/>
-              </a:spcAft>
-              <a:buNone/>
-            </a:pPr>
-            <a:r>
-              <a:rPr lang="en-US" sz="4000" dirty="0">
-                <a:solidFill>
-                  <a:srgbClr val="111111"/>
-                </a:solidFill>
-                <a:latin typeface="Times New Roman" pitchFamily="34" charset="0"/>
-                <a:ea typeface="Times New Roman" pitchFamily="34" charset="-122"/>
-                <a:cs typeface="Times New Roman" pitchFamily="34" charset="-120"/>
-              </a:rPr>
-              <a:t>The doldrums at the Equator and the horse latitudes near 30° have light, variable winds.</a:t>
+              <a:t>Describe the trade winds.</a:t>
             </a:r>
             <a:endParaRPr lang="en-US" sz="4000" dirty="0"/>
           </a:p>
@@ -16888,115 +16656,15 @@
                 <a:ea typeface="Calibri" pitchFamily="34" charset="-122"/>
                 <a:cs typeface="Calibri" pitchFamily="34" charset="-120"/>
               </a:rPr>
-              <a:t>BOARD SUMMARY</a:t>
+              <a:t>FORMATIVE EVALUATION</a:t>
             </a:r>
             <a:endParaRPr lang="en-US" sz="1400" dirty="0"/>
-          </a:p>
-        </p:txBody>
-      </p:sp>
-      <p:sp>
-        <p:nvSpPr>
-          <p:cNvPr id="3" name="Text 1"/>
-          <p:cNvSpPr/>
-          <p:nvPr/>
-        </p:nvSpPr>
-        <p:spPr>
-          <a:xfrm>
-            <a:off x="365760" y="1005840"/>
-            <a:ext cx="11460175" cy="731520"/>
-          </a:xfrm>
-          <a:prstGeom prst="rect">
-            <a:avLst/>
-          </a:prstGeom>
-          <a:noFill/>
-          <a:ln/>
-        </p:spPr>
-        <p:txBody>
-          <a:bodyPr wrap="square" lIns="0" tIns="0" rIns="0" bIns="0" rtlCol="0" anchor="ctr">
-            <a:normAutofit/>
-          </a:bodyPr>
-          <a:lstStyle/>
-          <a:p>
-            <a:pPr algn="ctr" indent="0" marL="0">
-              <a:buNone/>
-            </a:pPr>
-            <a:r>
-              <a:rPr lang="en-US" sz="3600" b="1" dirty="0">
-                <a:solidFill>
-                  <a:srgbClr val="990011"/>
-                </a:solidFill>
-                <a:latin typeface="Times New Roman" pitchFamily="34" charset="0"/>
-                <a:ea typeface="Times New Roman" pitchFamily="34" charset="-122"/>
-                <a:cs typeface="Times New Roman" pitchFamily="34" charset="-120"/>
-              </a:rPr>
-              <a:t>2. Types of Planetary Winds</a:t>
-            </a:r>
-            <a:endParaRPr lang="en-US" sz="3600" dirty="0"/>
-          </a:p>
-        </p:txBody>
-      </p:sp>
-      <p:sp>
-        <p:nvSpPr>
-          <p:cNvPr id="4" name="Text 2"/>
-          <p:cNvSpPr/>
-          <p:nvPr/>
-        </p:nvSpPr>
-        <p:spPr>
-          <a:xfrm>
-            <a:off x="365760" y="1783080"/>
-            <a:ext cx="4846320" cy="4617720"/>
-          </a:xfrm>
-          <a:prstGeom prst="rect">
-            <a:avLst/>
-          </a:prstGeom>
-          <a:noFill/>
-          <a:ln/>
-        </p:spPr>
-        <p:txBody>
-          <a:bodyPr wrap="square" lIns="0" tIns="0" rIns="0" bIns="0" rtlCol="0" anchor="t"/>
-          <a:lstStyle/>
-          <a:p>
-            <a:pPr algn="l" indent="0" marL="0">
-              <a:spcAft>
-                <a:spcPts val="800"/>
-              </a:spcAft>
-              <a:buNone/>
-            </a:pPr>
-            <a:r>
-              <a:rPr lang="en-US" sz="3600" b="1" dirty="0">
-                <a:solidFill>
-                  <a:srgbClr val="111111"/>
-                </a:solidFill>
-                <a:latin typeface="Times New Roman" pitchFamily="34" charset="0"/>
-                <a:ea typeface="Times New Roman" pitchFamily="34" charset="-122"/>
-                <a:cs typeface="Times New Roman" pitchFamily="34" charset="-120"/>
-              </a:rPr>
-              <a:t>Summary: </a:t>
-            </a:r>
-            <a:pPr algn="l" indent="0" marL="0">
-              <a:spcAft>
-                <a:spcPts val="800"/>
-              </a:spcAft>
-              <a:buNone/>
-            </a:pPr>
-            <a:r>
-              <a:rPr lang="en-US" sz="3600" dirty="0">
-                <a:solidFill>
-                  <a:srgbClr val="111111"/>
-                </a:solidFill>
-                <a:latin typeface="Times New Roman" pitchFamily="34" charset="0"/>
-                <a:ea typeface="Times New Roman" pitchFamily="34" charset="-122"/>
-                <a:cs typeface="Times New Roman" pitchFamily="34" charset="-120"/>
-              </a:rPr>
-              <a:t>The three winds form a regular pattern in each hemisphere.</a:t>
-            </a:r>
-            <a:endParaRPr lang="en-US" sz="3600" dirty="0"/>
           </a:p>
         </p:txBody>
       </p:sp>
       <p:pic>
         <p:nvPicPr>
-          <p:cNvPr id="5" name="Image 0" descr="/home/claude/f4/img/v2/met2_winds3.png">    </p:cNvPr>
+          <p:cNvPr id="3" name="Image 0" descr="/home/claude/f4/img/minesec_sheet.png">    </p:cNvPr>
           <p:cNvPicPr>
             <a:picLocks noChangeAspect="1"/>
           </p:cNvPicPr>
@@ -17010,8 +16678,8 @@
         </p:blipFill>
         <p:spPr>
           <a:xfrm>
-            <a:off x="5349240" y="2617506"/>
-            <a:ext cx="6659575" cy="2601397"/>
+            <a:off x="0" y="658368"/>
+            <a:ext cx="5120640" cy="5833872"/>
           </a:xfrm>
           <a:prstGeom prst="rect">
             <a:avLst/>
@@ -17020,14 +16688,14 @@
       </p:pic>
       <p:sp>
         <p:nvSpPr>
-          <p:cNvPr id="6" name="Text 3"/>
+          <p:cNvPr id="4" name="Text 1"/>
           <p:cNvSpPr/>
           <p:nvPr/>
         </p:nvSpPr>
         <p:spPr>
           <a:xfrm>
-            <a:off x="5349240" y="6089904"/>
-            <a:ext cx="6659575" cy="347472"/>
+            <a:off x="5349240" y="1005840"/>
+            <a:ext cx="6522415" cy="731520"/>
           </a:xfrm>
           <a:prstGeom prst="rect">
             <a:avLst/>
@@ -17036,24 +16704,68 @@
           <a:ln/>
         </p:spPr>
         <p:txBody>
-          <a:bodyPr wrap="square" lIns="0" tIns="0" rIns="0" bIns="0" rtlCol="0" anchor="ctr"/>
+          <a:bodyPr wrap="square" lIns="0" tIns="0" rIns="0" bIns="0" rtlCol="0" anchor="ctr">
+            <a:normAutofit/>
+          </a:bodyPr>
           <a:lstStyle/>
           <a:p>
             <a:pPr algn="ctr" indent="0" marL="0">
               <a:buNone/>
             </a:pPr>
             <a:r>
-              <a:rPr lang="en-US" sz="1600" i="1" dirty="0">
-                <a:solidFill>
-                  <a:srgbClr val="555555"/>
+              <a:rPr lang="en-US" sz="3600" b="1" dirty="0">
+                <a:solidFill>
+                  <a:srgbClr val="990011"/>
                 </a:solidFill>
                 <a:latin typeface="Times New Roman" pitchFamily="34" charset="0"/>
                 <a:ea typeface="Times New Roman" pitchFamily="34" charset="-122"/>
                 <a:cs typeface="Times New Roman" pitchFamily="34" charset="-120"/>
               </a:rPr>
-              <a:t>Illustration: the three planetary winds</a:t>
-            </a:r>
-            <a:endParaRPr lang="en-US" sz="1600" dirty="0"/>
+              <a:t>Expected Answer</a:t>
+            </a:r>
+            <a:endParaRPr lang="en-US" sz="3600" dirty="0"/>
+          </a:p>
+        </p:txBody>
+      </p:sp>
+      <p:sp>
+        <p:nvSpPr>
+          <p:cNvPr id="5" name="Text 2"/>
+          <p:cNvSpPr/>
+          <p:nvPr/>
+        </p:nvSpPr>
+        <p:spPr>
+          <a:xfrm>
+            <a:off x="5349240" y="1783080"/>
+            <a:ext cx="6522415" cy="4663440"/>
+          </a:xfrm>
+          <a:prstGeom prst="rect">
+            <a:avLst/>
+          </a:prstGeom>
+          <a:noFill/>
+          <a:ln/>
+        </p:spPr>
+        <p:txBody>
+          <a:bodyPr wrap="square" lIns="0" tIns="0" rIns="0" bIns="0" rtlCol="0" anchor="t"/>
+          <a:lstStyle/>
+          <a:p>
+            <a:pPr algn="l" indent="0" marL="0">
+              <a:spcAft>
+                <a:spcPts val="800"/>
+              </a:spcAft>
+              <a:buNone/>
+            </a:pPr>
+            <a:r>
+              <a:rPr lang="en-US" sz="4000" dirty="0">
+                <a:solidFill>
+                  <a:srgbClr val="111111"/>
+                </a:solidFill>
+                <a:latin typeface="Times New Roman" pitchFamily="34" charset="0"/>
+                <a:ea typeface="Times New Roman" pitchFamily="34" charset="-122"/>
+                <a:cs typeface="Times New Roman" pitchFamily="34" charset="-120"/>
+              </a:rPr>
+              <a:t>Steady winds blowing from the subtropical highs to the Equator, from the north-east (N. hemisphere) and south-east (S. hemisphere).</a:t>
+            </a:r>
+            <a:endParaRPr lang="en-US" sz="4000" dirty="0"/>
           </a:p>
         </p:txBody>
       </p:sp>
@@ -17228,7 +16940,7 @@
                 <a:ea typeface="Times New Roman" pitchFamily="34" charset="-122"/>
                 <a:cs typeface="Times New Roman" pitchFamily="34" charset="-120"/>
               </a:rPr>
-              <a:t>Evaluation 1</a:t>
+              <a:t>Evaluation 2</a:t>
             </a:r>
             <a:endParaRPr lang="en-US" sz="3600" dirty="0"/>
           </a:p>
@@ -17270,7 +16982,7 @@
                 <a:ea typeface="Times New Roman" pitchFamily="34" charset="-122"/>
                 <a:cs typeface="Times New Roman" pitchFamily="34" charset="-120"/>
               </a:rPr>
-              <a:t>Describe the trade winds.</a:t>
+              <a:t>Explain the Coriolis effect.</a:t>
             </a:r>
             <a:endParaRPr lang="en-US" sz="4000" dirty="0"/>
           </a:p>
@@ -17489,7 +17201,7 @@
                 <a:ea typeface="Times New Roman" pitchFamily="34" charset="-122"/>
                 <a:cs typeface="Times New Roman" pitchFamily="34" charset="-120"/>
               </a:rPr>
-              <a:t>Steady winds blowing from the subtropical highs to the Equator, from the north-east (N. hemisphere) and south-east (S. hemisphere).</a:t>
+              <a:t>The rotation of the Earth deflects winds to the right in the northern hemisphere and to the left in the southern hemisphere.</a:t>
             </a:r>
             <a:endParaRPr lang="en-US" sz="4000" dirty="0"/>
           </a:p>
@@ -17601,7 +17313,7 @@
                 <a:ea typeface="Calibri" pitchFamily="34" charset="-122"/>
                 <a:cs typeface="Calibri" pitchFamily="34" charset="-120"/>
               </a:rPr>
-              <a:t>FORMATIVE EVALUATION</a:t>
+              <a:t>REMEDIATION</a:t>
             </a:r>
             <a:endParaRPr lang="en-US" sz="1400" dirty="0"/>
           </a:p>
@@ -17624,7 +17336,7 @@
         <p:spPr>
           <a:xfrm>
             <a:off x="0" y="658368"/>
-            <a:ext cx="5120640" cy="5833872"/>
+            <a:ext cx="1463040" cy="5833872"/>
           </a:xfrm>
           <a:prstGeom prst="rect">
             <a:avLst/>
@@ -17639,8 +17351,8 @@
         </p:nvSpPr>
         <p:spPr>
           <a:xfrm>
-            <a:off x="5349240" y="1005840"/>
-            <a:ext cx="6522415" cy="731520"/>
+            <a:off x="1691640" y="1005840"/>
+            <a:ext cx="10180015" cy="731520"/>
           </a:xfrm>
           <a:prstGeom prst="rect">
             <a:avLst/>
@@ -17666,7 +17378,7 @@
                 <a:ea typeface="Times New Roman" pitchFamily="34" charset="-122"/>
                 <a:cs typeface="Times New Roman" pitchFamily="34" charset="-120"/>
               </a:rPr>
-              <a:t>Evaluation 2</a:t>
+              <a:t>Remediation</a:t>
             </a:r>
             <a:endParaRPr lang="en-US" sz="3600" dirty="0"/>
           </a:p>
@@ -17680,8 +17392,8 @@
         </p:nvSpPr>
         <p:spPr>
           <a:xfrm>
-            <a:off x="5349240" y="1783080"/>
-            <a:ext cx="6522415" cy="4663440"/>
+            <a:off x="1691640" y="1783080"/>
+            <a:ext cx="10180015" cy="4663440"/>
           </a:xfrm>
           <a:prstGeom prst="rect">
             <a:avLst/>
@@ -17700,7 +17412,7 @@
               <a:buNone/>
             </a:pPr>
             <a:r>
-              <a:rPr lang="en-US" sz="4000" dirty="0">
+              <a:rPr lang="en-US" sz="4000" b="1" dirty="0">
                 <a:solidFill>
                   <a:srgbClr val="111111"/>
                 </a:solidFill>
@@ -17708,7 +17420,73 @@
                 <a:ea typeface="Times New Roman" pitchFamily="34" charset="-122"/>
                 <a:cs typeface="Times New Roman" pitchFamily="34" charset="-120"/>
               </a:rPr>
-              <a:t>Explain the Coriolis effect.</a:t>
+              <a:t>Fill in the blanks:</a:t>
+            </a:r>
+            <a:endParaRPr lang="en-US" sz="4000" dirty="0"/>
+          </a:p>
+          <a:p>
+            <a:pPr algn="l" marL="342900" indent="-342900">
+              <a:spcAft>
+                <a:spcPts val="800"/>
+              </a:spcAft>
+              <a:buSzPct val="100000"/>
+              <a:buFont typeface="+mj-lt"/>
+              <a:buAutoNum type="arabicPeriod" startAt="1"/>
+            </a:pPr>
+            <a:r>
+              <a:rPr lang="en-US" sz="4000" dirty="0">
+                <a:solidFill>
+                  <a:srgbClr val="111111"/>
+                </a:solidFill>
+                <a:latin typeface="Times New Roman" pitchFamily="34" charset="0"/>
+                <a:ea typeface="Times New Roman" pitchFamily="34" charset="-122"/>
+                <a:cs typeface="Times New Roman" pitchFamily="34" charset="-120"/>
+              </a:rPr>
+              <a:t>Winds blow from high to ______ pressure.</a:t>
+            </a:r>
+            <a:endParaRPr lang="en-US" sz="4000" dirty="0"/>
+          </a:p>
+          <a:p>
+            <a:pPr algn="l" marL="342900" indent="-342900">
+              <a:spcAft>
+                <a:spcPts val="800"/>
+              </a:spcAft>
+              <a:buSzPct val="100000"/>
+              <a:buFont typeface="+mj-lt"/>
+              <a:buAutoNum type="arabicPeriod" startAt="1"/>
+            </a:pPr>
+            <a:r>
+              <a:rPr lang="en-US" sz="4000" dirty="0">
+                <a:solidFill>
+                  <a:srgbClr val="111111"/>
+                </a:solidFill>
+                <a:latin typeface="Times New Roman" pitchFamily="34" charset="0"/>
+                <a:ea typeface="Times New Roman" pitchFamily="34" charset="-122"/>
+                <a:cs typeface="Times New Roman" pitchFamily="34" charset="-120"/>
+              </a:rPr>
+              <a:t>The winds between 30° and 60° are the ______.</a:t>
+            </a:r>
+            <a:endParaRPr lang="en-US" sz="4000" dirty="0"/>
+          </a:p>
+          <a:p>
+            <a:pPr algn="l" marL="342900" indent="-342900">
+              <a:spcAft>
+                <a:spcPts val="800"/>
+              </a:spcAft>
+              <a:buSzPct val="100000"/>
+              <a:buFont typeface="+mj-lt"/>
+              <a:buAutoNum type="arabicPeriod" startAt="1"/>
+            </a:pPr>
+            <a:r>
+              <a:rPr lang="en-US" sz="4000" dirty="0">
+                <a:solidFill>
+                  <a:srgbClr val="111111"/>
+                </a:solidFill>
+                <a:latin typeface="Times New Roman" pitchFamily="34" charset="0"/>
+                <a:ea typeface="Times New Roman" pitchFamily="34" charset="-122"/>
+                <a:cs typeface="Times New Roman" pitchFamily="34" charset="-120"/>
+              </a:rPr>
+              <a:t>The calm belt at the Equator is the ______.</a:t>
             </a:r>
             <a:endParaRPr lang="en-US" sz="4000" dirty="0"/>
           </a:p>
@@ -17820,7 +17598,7 @@
                 <a:ea typeface="Calibri" pitchFamily="34" charset="-122"/>
                 <a:cs typeface="Calibri" pitchFamily="34" charset="-120"/>
               </a:rPr>
-              <a:t>FORMATIVE EVALUATION</a:t>
+              <a:t>HOMEWORK</a:t>
             </a:r>
             <a:endParaRPr lang="en-US" sz="1400" dirty="0"/>
           </a:p>
@@ -17885,7 +17663,7 @@
                 <a:ea typeface="Times New Roman" pitchFamily="34" charset="-122"/>
                 <a:cs typeface="Times New Roman" pitchFamily="34" charset="-120"/>
               </a:rPr>
-              <a:t>Expected Answer</a:t>
+              <a:t>Homework</a:t>
             </a:r>
             <a:endParaRPr lang="en-US" sz="3600" dirty="0"/>
           </a:p>
@@ -17927,7 +17705,7 @@
                 <a:ea typeface="Times New Roman" pitchFamily="34" charset="-122"/>
                 <a:cs typeface="Times New Roman" pitchFamily="34" charset="-120"/>
               </a:rPr>
-              <a:t>The rotation of the Earth deflects winds to the right in the northern hemisphere and to the left in the southern hemisphere.</a:t>
+              <a:t>Name the dry wind that blows over Garoua in the dry season.</a:t>
             </a:r>
             <a:endParaRPr lang="en-US" sz="4000" dirty="0"/>
           </a:p>
@@ -18258,7 +18036,7 @@
                 <a:ea typeface="Calibri" pitchFamily="34" charset="-122"/>
                 <a:cs typeface="Calibri" pitchFamily="34" charset="-120"/>
               </a:rPr>
-              <a:t>REMEDIATION</a:t>
+              <a:t>NEXT LESSON</a:t>
             </a:r>
             <a:endParaRPr lang="en-US" sz="1400" dirty="0"/>
           </a:p>
@@ -18281,7 +18059,7 @@
         <p:spPr>
           <a:xfrm>
             <a:off x="0" y="658368"/>
-            <a:ext cx="1463040" cy="5833872"/>
+            <a:ext cx="5120640" cy="5833872"/>
           </a:xfrm>
           <a:prstGeom prst="rect">
             <a:avLst/>
@@ -18296,8 +18074,8 @@
         </p:nvSpPr>
         <p:spPr>
           <a:xfrm>
-            <a:off x="1691640" y="1005840"/>
-            <a:ext cx="10180015" cy="731520"/>
+            <a:off x="5349240" y="1005840"/>
+            <a:ext cx="6522415" cy="731520"/>
           </a:xfrm>
           <a:prstGeom prst="rect">
             <a:avLst/>
@@ -18323,7 +18101,7 @@
                 <a:ea typeface="Times New Roman" pitchFamily="34" charset="-122"/>
                 <a:cs typeface="Times New Roman" pitchFamily="34" charset="-120"/>
               </a:rPr>
-              <a:t>Remediation</a:t>
+              <a:t>Next Lesson</a:t>
             </a:r>
             <a:endParaRPr lang="en-US" sz="3600" dirty="0"/>
           </a:p>
@@ -18337,8 +18115,8 @@
         </p:nvSpPr>
         <p:spPr>
           <a:xfrm>
-            <a:off x="1691640" y="1783080"/>
-            <a:ext cx="10180015" cy="4663440"/>
+            <a:off x="5349240" y="1783080"/>
+            <a:ext cx="6522415" cy="4663440"/>
           </a:xfrm>
           <a:prstGeom prst="rect">
             <a:avLst/>
@@ -18347,10 +18125,10 @@
           <a:ln/>
         </p:spPr>
         <p:txBody>
-          <a:bodyPr wrap="square" lIns="0" tIns="0" rIns="0" bIns="0" rtlCol="0" anchor="t"/>
-          <a:lstStyle/>
-          <a:p>
-            <a:pPr algn="l" indent="0" marL="0">
+          <a:bodyPr wrap="square" lIns="0" tIns="0" rIns="0" bIns="0" rtlCol="0" anchor="ctr"/>
+          <a:lstStyle/>
+          <a:p>
+            <a:pPr algn="ctr" indent="0" marL="0">
               <a:spcAft>
                 <a:spcPts val="800"/>
               </a:spcAft>
@@ -18365,73 +18143,27 @@
                 <a:ea typeface="Times New Roman" pitchFamily="34" charset="-122"/>
                 <a:cs typeface="Times New Roman" pitchFamily="34" charset="-120"/>
               </a:rPr>
-              <a:t>Fill in the blanks:</a:t>
+              <a:t>Our next lesson will be on:</a:t>
             </a:r>
             <a:endParaRPr lang="en-US" sz="4000" dirty="0"/>
           </a:p>
           <a:p>
-            <a:pPr algn="l" marL="342900" indent="-342900">
+            <a:pPr algn="ctr" indent="0" marL="0">
               <a:spcAft>
                 <a:spcPts val="800"/>
               </a:spcAft>
-              <a:buSzPct val="100000"/>
-              <a:buFont typeface="+mj-lt"/>
-              <a:buAutoNum type="arabicPeriod" startAt="1"/>
+              <a:buNone/>
             </a:pPr>
             <a:r>
-              <a:rPr lang="en-US" sz="4000" dirty="0">
-                <a:solidFill>
-                  <a:srgbClr val="111111"/>
+              <a:rPr lang="en-US" sz="4000" b="1" dirty="0">
+                <a:solidFill>
+                  <a:srgbClr val="990011"/>
                 </a:solidFill>
                 <a:latin typeface="Times New Roman" pitchFamily="34" charset="0"/>
                 <a:ea typeface="Times New Roman" pitchFamily="34" charset="-122"/>
                 <a:cs typeface="Times New Roman" pitchFamily="34" charset="-120"/>
               </a:rPr>
-              <a:t>Winds blow from high to ______ pressure.</a:t>
-            </a:r>
-            <a:endParaRPr lang="en-US" sz="4000" dirty="0"/>
-          </a:p>
-          <a:p>
-            <a:pPr algn="l" marL="342900" indent="-342900">
-              <a:spcAft>
-                <a:spcPts val="800"/>
-              </a:spcAft>
-              <a:buSzPct val="100000"/>
-              <a:buFont typeface="+mj-lt"/>
-              <a:buAutoNum type="arabicPeriod" startAt="1"/>
-            </a:pPr>
-            <a:r>
-              <a:rPr lang="en-US" sz="4000" dirty="0">
-                <a:solidFill>
-                  <a:srgbClr val="111111"/>
-                </a:solidFill>
-                <a:latin typeface="Times New Roman" pitchFamily="34" charset="0"/>
-                <a:ea typeface="Times New Roman" pitchFamily="34" charset="-122"/>
-                <a:cs typeface="Times New Roman" pitchFamily="34" charset="-120"/>
-              </a:rPr>
-              <a:t>The winds between 30° and 60° are the ______.</a:t>
-            </a:r>
-            <a:endParaRPr lang="en-US" sz="4000" dirty="0"/>
-          </a:p>
-          <a:p>
-            <a:pPr algn="l" marL="342900" indent="-342900">
-              <a:spcAft>
-                <a:spcPts val="800"/>
-              </a:spcAft>
-              <a:buSzPct val="100000"/>
-              <a:buFont typeface="+mj-lt"/>
-              <a:buAutoNum type="arabicPeriod" startAt="1"/>
-            </a:pPr>
-            <a:r>
-              <a:rPr lang="en-US" sz="4000" dirty="0">
-                <a:solidFill>
-                  <a:srgbClr val="111111"/>
-                </a:solidFill>
-                <a:latin typeface="Times New Roman" pitchFamily="34" charset="0"/>
-                <a:ea typeface="Times New Roman" pitchFamily="34" charset="-122"/>
-                <a:cs typeface="Times New Roman" pitchFamily="34" charset="-120"/>
-              </a:rPr>
-              <a:t>The calm belt at the Equator is the ______.</a:t>
+              <a:t>Lesson 16: Tropical Seasonal Winds: Monsoon and Harmattan</a:t>
             </a:r>
             <a:endParaRPr lang="en-US" sz="4000" dirty="0"/>
           </a:p>
@@ -18543,464 +18275,6 @@
                 <a:ea typeface="Calibri" pitchFamily="34" charset="-122"/>
                 <a:cs typeface="Calibri" pitchFamily="34" charset="-120"/>
               </a:rPr>
-              <a:t>HOMEWORK</a:t>
-            </a:r>
-            <a:endParaRPr lang="en-US" sz="1400" dirty="0"/>
-          </a:p>
-        </p:txBody>
-      </p:sp>
-      <p:pic>
-        <p:nvPicPr>
-          <p:cNvPr id="3" name="Image 0" descr="/home/claude/f4/img/minesec_sheet.png">    </p:cNvPr>
-          <p:cNvPicPr>
-            <a:picLocks noChangeAspect="1"/>
-          </p:cNvPicPr>
-          <p:nvPr/>
-        </p:nvPicPr>
-        <p:blipFill>
-          <a:blip r:embed="rId1"/>
-          <a:stretch>
-            <a:fillRect/>
-          </a:stretch>
-        </p:blipFill>
-        <p:spPr>
-          <a:xfrm>
-            <a:off x="0" y="658368"/>
-            <a:ext cx="5120640" cy="5833872"/>
-          </a:xfrm>
-          <a:prstGeom prst="rect">
-            <a:avLst/>
-          </a:prstGeom>
-        </p:spPr>
-      </p:pic>
-      <p:sp>
-        <p:nvSpPr>
-          <p:cNvPr id="4" name="Text 1"/>
-          <p:cNvSpPr/>
-          <p:nvPr/>
-        </p:nvSpPr>
-        <p:spPr>
-          <a:xfrm>
-            <a:off x="5349240" y="1005840"/>
-            <a:ext cx="6522415" cy="731520"/>
-          </a:xfrm>
-          <a:prstGeom prst="rect">
-            <a:avLst/>
-          </a:prstGeom>
-          <a:noFill/>
-          <a:ln/>
-        </p:spPr>
-        <p:txBody>
-          <a:bodyPr wrap="square" lIns="0" tIns="0" rIns="0" bIns="0" rtlCol="0" anchor="ctr">
-            <a:normAutofit/>
-          </a:bodyPr>
-          <a:lstStyle/>
-          <a:p>
-            <a:pPr algn="ctr" indent="0" marL="0">
-              <a:buNone/>
-            </a:pPr>
-            <a:r>
-              <a:rPr lang="en-US" sz="3600" b="1" dirty="0">
-                <a:solidFill>
-                  <a:srgbClr val="990011"/>
-                </a:solidFill>
-                <a:latin typeface="Times New Roman" pitchFamily="34" charset="0"/>
-                <a:ea typeface="Times New Roman" pitchFamily="34" charset="-122"/>
-                <a:cs typeface="Times New Roman" pitchFamily="34" charset="-120"/>
-              </a:rPr>
-              <a:t>Homework</a:t>
-            </a:r>
-            <a:endParaRPr lang="en-US" sz="3600" dirty="0"/>
-          </a:p>
-        </p:txBody>
-      </p:sp>
-      <p:sp>
-        <p:nvSpPr>
-          <p:cNvPr id="5" name="Text 2"/>
-          <p:cNvSpPr/>
-          <p:nvPr/>
-        </p:nvSpPr>
-        <p:spPr>
-          <a:xfrm>
-            <a:off x="5349240" y="1783080"/>
-            <a:ext cx="6522415" cy="4663440"/>
-          </a:xfrm>
-          <a:prstGeom prst="rect">
-            <a:avLst/>
-          </a:prstGeom>
-          <a:noFill/>
-          <a:ln/>
-        </p:spPr>
-        <p:txBody>
-          <a:bodyPr wrap="square" lIns="0" tIns="0" rIns="0" bIns="0" rtlCol="0" anchor="t"/>
-          <a:lstStyle/>
-          <a:p>
-            <a:pPr algn="l" indent="0" marL="0">
-              <a:spcAft>
-                <a:spcPts val="800"/>
-              </a:spcAft>
-              <a:buNone/>
-            </a:pPr>
-            <a:r>
-              <a:rPr lang="en-US" sz="4000" dirty="0">
-                <a:solidFill>
-                  <a:srgbClr val="111111"/>
-                </a:solidFill>
-                <a:latin typeface="Times New Roman" pitchFamily="34" charset="0"/>
-                <a:ea typeface="Times New Roman" pitchFamily="34" charset="-122"/>
-                <a:cs typeface="Times New Roman" pitchFamily="34" charset="-120"/>
-              </a:rPr>
-              <a:t>Name the dry wind that blows over Garoua in the dry season.</a:t>
-            </a:r>
-            <a:endParaRPr lang="en-US" sz="4000" dirty="0"/>
-          </a:p>
-        </p:txBody>
-      </p:sp>
-      <p:sp>
-        <p:nvSpPr>
-          <p:cNvPr id="25" name="Slide Number Placeholder 0"/>
-          <p:cNvSpPr>
-            <a:spLocks noGrp="1"/>
-          </p:cNvSpPr>
-          <p:nvPr>
-            <p:ph type="sldNum" sz="quarter" idx="4294967295"/>
-          </p:nvPr>
-        </p:nvSpPr>
-        <p:spPr>
-          <a:xfrm>
-            <a:off x="27432" y="91440"/>
-            <a:ext cx="585216" cy="475488"/>
-          </a:xfrm>
-          <a:prstGeom prst="rect">
-            <a:avLst/>
-          </a:prstGeom>
-          <a:extLst>
-            <a:ext uri="{C572A759-6A51-4108-AA02-DFA0A04FC94B}">
-              <ma14:wrappingTextBoxFlag xmlns:ma14="http://schemas.microsoft.com/office/mac/drawingml/2011/main" val="0"/>
-            </a:ext>
-          </a:extLst>
-        </p:spPr>
-        <p:txBody>
-          <a:bodyPr/>
-          <a:lstStyle>
-            <a:lvl1pPr>
-              <a:defRPr sz="2000">
-                <a:solidFill>
-                  <a:srgbClr val="FFFFFF"/>
-                </a:solidFill>
-                <a:latin typeface="Calibri"/>
-                <a:ea typeface="Calibri"/>
-                <a:cs typeface="Calibri"/>
-              </a:defRPr>
-            </a:lvl1pPr>
-          </a:lstStyle>
-          <a:p>
-            <a:pPr algn="ctr"/>
-            <a:fld id="{F7021451-1387-4CA6-816F-3879F97B5CBC}" type="slidenum">
-              <a:rPr b="1" lang="en-US"/>
-              <a:t>51</a:t>
-            </a:fld>
-            <a:endParaRPr lang="en-US"/>
-          </a:p>
-        </p:txBody>
-      </p:sp>
-    </p:spTree>
-  </p:cSld>
-  <p:clrMapOvr>
-    <a:masterClrMapping/>
-  </p:clrMapOvr>
-</p:sld>
-</file>
-
-<file path=ppt/slides/slide52.xml><?xml version="1.0" encoding="utf-8"?>
-<p:sld xmlns:a="http://schemas.openxmlformats.org/drawingml/2006/main" xmlns:r="http://schemas.openxmlformats.org/officeDocument/2006/relationships" xmlns:p="http://schemas.openxmlformats.org/presentationml/2006/main">
-  <p:cSld name="Slide 52">
-    <p:spTree>
-      <p:nvGrpSpPr>
-        <p:cNvPr id="1" name=""/>
-        <p:cNvGrpSpPr/>
-        <p:nvPr/>
-      </p:nvGrpSpPr>
-      <p:grpSpPr>
-        <a:xfrm>
-          <a:off x="0" y="0"/>
-          <a:ext cx="0" cy="0"/>
-          <a:chOff x="0" y="0"/>
-          <a:chExt cx="0" cy="0"/>
-        </a:xfrm>
-      </p:grpSpPr>
-      <p:sp>
-        <p:nvSpPr>
-          <p:cNvPr id="2" name="Text 0"/>
-          <p:cNvSpPr/>
-          <p:nvPr/>
-        </p:nvSpPr>
-        <p:spPr>
-          <a:xfrm>
-            <a:off x="457200" y="713232"/>
-            <a:ext cx="11368735" cy="274320"/>
-          </a:xfrm>
-          <a:prstGeom prst="rect">
-            <a:avLst/>
-          </a:prstGeom>
-          <a:noFill/>
-          <a:ln/>
-        </p:spPr>
-        <p:txBody>
-          <a:bodyPr wrap="square" lIns="0" tIns="0" rIns="0" bIns="0" rtlCol="0" anchor="ctr"/>
-          <a:lstStyle/>
-          <a:p>
-            <a:pPr algn="r" indent="0" marL="0">
-              <a:buNone/>
-            </a:pPr>
-            <a:r>
-              <a:rPr lang="en-US" sz="1400" b="1" dirty="0">
-                <a:solidFill>
-                  <a:srgbClr val="1C3F6E"/>
-                </a:solidFill>
-                <a:latin typeface="Calibri" pitchFamily="34" charset="0"/>
-                <a:ea typeface="Calibri" pitchFamily="34" charset="-122"/>
-                <a:cs typeface="Calibri" pitchFamily="34" charset="-120"/>
-              </a:rPr>
-              <a:t>NEXT LESSON</a:t>
-            </a:r>
-            <a:endParaRPr lang="en-US" sz="1400" dirty="0"/>
-          </a:p>
-        </p:txBody>
-      </p:sp>
-      <p:pic>
-        <p:nvPicPr>
-          <p:cNvPr id="3" name="Image 0" descr="/home/claude/f4/img/minesec_sheet.png">    </p:cNvPr>
-          <p:cNvPicPr>
-            <a:picLocks noChangeAspect="1"/>
-          </p:cNvPicPr>
-          <p:nvPr/>
-        </p:nvPicPr>
-        <p:blipFill>
-          <a:blip r:embed="rId1"/>
-          <a:stretch>
-            <a:fillRect/>
-          </a:stretch>
-        </p:blipFill>
-        <p:spPr>
-          <a:xfrm>
-            <a:off x="0" y="658368"/>
-            <a:ext cx="5120640" cy="5833872"/>
-          </a:xfrm>
-          <a:prstGeom prst="rect">
-            <a:avLst/>
-          </a:prstGeom>
-        </p:spPr>
-      </p:pic>
-      <p:sp>
-        <p:nvSpPr>
-          <p:cNvPr id="4" name="Text 1"/>
-          <p:cNvSpPr/>
-          <p:nvPr/>
-        </p:nvSpPr>
-        <p:spPr>
-          <a:xfrm>
-            <a:off x="5349240" y="1005840"/>
-            <a:ext cx="6522415" cy="731520"/>
-          </a:xfrm>
-          <a:prstGeom prst="rect">
-            <a:avLst/>
-          </a:prstGeom>
-          <a:noFill/>
-          <a:ln/>
-        </p:spPr>
-        <p:txBody>
-          <a:bodyPr wrap="square" lIns="0" tIns="0" rIns="0" bIns="0" rtlCol="0" anchor="ctr">
-            <a:normAutofit/>
-          </a:bodyPr>
-          <a:lstStyle/>
-          <a:p>
-            <a:pPr algn="ctr" indent="0" marL="0">
-              <a:buNone/>
-            </a:pPr>
-            <a:r>
-              <a:rPr lang="en-US" sz="3600" b="1" dirty="0">
-                <a:solidFill>
-                  <a:srgbClr val="990011"/>
-                </a:solidFill>
-                <a:latin typeface="Times New Roman" pitchFamily="34" charset="0"/>
-                <a:ea typeface="Times New Roman" pitchFamily="34" charset="-122"/>
-                <a:cs typeface="Times New Roman" pitchFamily="34" charset="-120"/>
-              </a:rPr>
-              <a:t>Next Lesson</a:t>
-            </a:r>
-            <a:endParaRPr lang="en-US" sz="3600" dirty="0"/>
-          </a:p>
-        </p:txBody>
-      </p:sp>
-      <p:sp>
-        <p:nvSpPr>
-          <p:cNvPr id="5" name="Text 2"/>
-          <p:cNvSpPr/>
-          <p:nvPr/>
-        </p:nvSpPr>
-        <p:spPr>
-          <a:xfrm>
-            <a:off x="5349240" y="1783080"/>
-            <a:ext cx="6522415" cy="4663440"/>
-          </a:xfrm>
-          <a:prstGeom prst="rect">
-            <a:avLst/>
-          </a:prstGeom>
-          <a:noFill/>
-          <a:ln/>
-        </p:spPr>
-        <p:txBody>
-          <a:bodyPr wrap="square" lIns="0" tIns="0" rIns="0" bIns="0" rtlCol="0" anchor="ctr"/>
-          <a:lstStyle/>
-          <a:p>
-            <a:pPr algn="ctr" indent="0" marL="0">
-              <a:spcAft>
-                <a:spcPts val="800"/>
-              </a:spcAft>
-              <a:buNone/>
-            </a:pPr>
-            <a:r>
-              <a:rPr lang="en-US" sz="4000" b="1" dirty="0">
-                <a:solidFill>
-                  <a:srgbClr val="111111"/>
-                </a:solidFill>
-                <a:latin typeface="Times New Roman" pitchFamily="34" charset="0"/>
-                <a:ea typeface="Times New Roman" pitchFamily="34" charset="-122"/>
-                <a:cs typeface="Times New Roman" pitchFamily="34" charset="-120"/>
-              </a:rPr>
-              <a:t>Our next lesson will be on:</a:t>
-            </a:r>
-            <a:endParaRPr lang="en-US" sz="4000" dirty="0"/>
-          </a:p>
-          <a:p>
-            <a:pPr algn="ctr" indent="0" marL="0">
-              <a:spcAft>
-                <a:spcPts val="800"/>
-              </a:spcAft>
-              <a:buNone/>
-            </a:pPr>
-            <a:r>
-              <a:rPr lang="en-US" sz="4000" b="1" dirty="0">
-                <a:solidFill>
-                  <a:srgbClr val="990011"/>
-                </a:solidFill>
-                <a:latin typeface="Times New Roman" pitchFamily="34" charset="0"/>
-                <a:ea typeface="Times New Roman" pitchFamily="34" charset="-122"/>
-                <a:cs typeface="Times New Roman" pitchFamily="34" charset="-120"/>
-              </a:rPr>
-              <a:t>Lesson 16: Tropical Seasonal Winds: Monsoon and Harmattan</a:t>
-            </a:r>
-            <a:endParaRPr lang="en-US" sz="4000" dirty="0"/>
-          </a:p>
-        </p:txBody>
-      </p:sp>
-      <p:sp>
-        <p:nvSpPr>
-          <p:cNvPr id="25" name="Slide Number Placeholder 0"/>
-          <p:cNvSpPr>
-            <a:spLocks noGrp="1"/>
-          </p:cNvSpPr>
-          <p:nvPr>
-            <p:ph type="sldNum" sz="quarter" idx="4294967295"/>
-          </p:nvPr>
-        </p:nvSpPr>
-        <p:spPr>
-          <a:xfrm>
-            <a:off x="27432" y="91440"/>
-            <a:ext cx="585216" cy="475488"/>
-          </a:xfrm>
-          <a:prstGeom prst="rect">
-            <a:avLst/>
-          </a:prstGeom>
-          <a:extLst>
-            <a:ext uri="{C572A759-6A51-4108-AA02-DFA0A04FC94B}">
-              <ma14:wrappingTextBoxFlag xmlns:ma14="http://schemas.microsoft.com/office/mac/drawingml/2011/main" val="0"/>
-            </a:ext>
-          </a:extLst>
-        </p:spPr>
-        <p:txBody>
-          <a:bodyPr/>
-          <a:lstStyle>
-            <a:lvl1pPr>
-              <a:defRPr sz="2000">
-                <a:solidFill>
-                  <a:srgbClr val="FFFFFF"/>
-                </a:solidFill>
-                <a:latin typeface="Calibri"/>
-                <a:ea typeface="Calibri"/>
-                <a:cs typeface="Calibri"/>
-              </a:defRPr>
-            </a:lvl1pPr>
-          </a:lstStyle>
-          <a:p>
-            <a:pPr algn="ctr"/>
-            <a:fld id="{F7021451-1387-4CA6-816F-3879F97B5CBC}" type="slidenum">
-              <a:rPr b="1" lang="en-US"/>
-              <a:t>52</a:t>
-            </a:fld>
-            <a:endParaRPr lang="en-US"/>
-          </a:p>
-        </p:txBody>
-      </p:sp>
-    </p:spTree>
-  </p:cSld>
-  <p:clrMapOvr>
-    <a:masterClrMapping/>
-  </p:clrMapOvr>
-</p:sld>
-</file>
-
-<file path=ppt/slides/slide53.xml><?xml version="1.0" encoding="utf-8"?>
-<p:sld xmlns:a="http://schemas.openxmlformats.org/drawingml/2006/main" xmlns:r="http://schemas.openxmlformats.org/officeDocument/2006/relationships" xmlns:p="http://schemas.openxmlformats.org/presentationml/2006/main">
-  <p:cSld name="Slide 53">
-    <p:spTree>
-      <p:nvGrpSpPr>
-        <p:cNvPr id="1" name=""/>
-        <p:cNvGrpSpPr/>
-        <p:nvPr/>
-      </p:nvGrpSpPr>
-      <p:grpSpPr>
-        <a:xfrm>
-          <a:off x="0" y="0"/>
-          <a:ext cx="0" cy="0"/>
-          <a:chOff x="0" y="0"/>
-          <a:chExt cx="0" cy="0"/>
-        </a:xfrm>
-      </p:grpSpPr>
-      <p:sp>
-        <p:nvSpPr>
-          <p:cNvPr id="2" name="Text 0"/>
-          <p:cNvSpPr/>
-          <p:nvPr/>
-        </p:nvSpPr>
-        <p:spPr>
-          <a:xfrm>
-            <a:off x="457200" y="713232"/>
-            <a:ext cx="11368735" cy="274320"/>
-          </a:xfrm>
-          <a:prstGeom prst="rect">
-            <a:avLst/>
-          </a:prstGeom>
-          <a:noFill/>
-          <a:ln/>
-        </p:spPr>
-        <p:txBody>
-          <a:bodyPr wrap="square" lIns="0" tIns="0" rIns="0" bIns="0" rtlCol="0" anchor="ctr"/>
-          <a:lstStyle/>
-          <a:p>
-            <a:pPr algn="r" indent="0" marL="0">
-              <a:buNone/>
-            </a:pPr>
-            <a:r>
-              <a:rPr lang="en-US" sz="1400" b="1" dirty="0">
-                <a:solidFill>
-                  <a:srgbClr val="1C3F6E"/>
-                </a:solidFill>
-                <a:latin typeface="Calibri" pitchFamily="34" charset="0"/>
-                <a:ea typeface="Calibri" pitchFamily="34" charset="-122"/>
-                <a:cs typeface="Calibri" pitchFamily="34" charset="-120"/>
-              </a:rPr>
               <a:t>BILINGUAL GAME</a:t>
             </a:r>
             <a:endParaRPr lang="en-US" sz="1400" dirty="0"/>
@@ -19048,7 +18322,7 @@
       </p:sp>
       <p:graphicFrame>
         <p:nvGraphicFramePr>
-          <p:cNvPr id="54" name="Table 0"/>
+          <p:cNvPr id="52" name="Table 0"/>
           <p:cNvGraphicFramePr>
             <a:graphicFrameLocks noGrp="1"/>
           </p:cNvGraphicFramePr>
@@ -20084,7 +19358,7 @@
             <a:pPr algn="ctr"/>
             <a:fld id="{F7021451-1387-4CA6-816F-3879F97B5CBC}" type="slidenum">
               <a:rPr b="1" lang="en-US"/>
-              <a:t>53</a:t>
+              <a:t>51</a:t>
             </a:fld>
             <a:endParaRPr lang="en-US"/>
           </a:p>
@@ -20098,9 +19372,9 @@
 </p:sld>
 </file>
 
-<file path=ppt/slides/slide54.xml><?xml version="1.0" encoding="utf-8"?>
+<file path=ppt/slides/slide52.xml><?xml version="1.0" encoding="utf-8"?>
 <p:sld xmlns:a="http://schemas.openxmlformats.org/drawingml/2006/main" xmlns:r="http://schemas.openxmlformats.org/officeDocument/2006/relationships" xmlns:p="http://schemas.openxmlformats.org/presentationml/2006/main">
-  <p:cSld name="Slide 54">
+  <p:cSld name="Slide 52">
     <p:spTree>
       <p:nvGrpSpPr>
         <p:cNvPr id="1" name=""/>
@@ -20195,7 +19469,7 @@
       </p:sp>
       <p:graphicFrame>
         <p:nvGraphicFramePr>
-          <p:cNvPr id="55" name="Table 0"/>
+          <p:cNvPr id="53" name="Table 0"/>
           <p:cNvGraphicFramePr>
             <a:graphicFrameLocks noGrp="1"/>
           </p:cNvGraphicFramePr>
@@ -20817,7 +20091,7 @@
             <a:pPr algn="ctr"/>
             <a:fld id="{F7021451-1387-4CA6-816F-3879F97B5CBC}" type="slidenum">
               <a:rPr b="1" lang="en-US"/>
-              <a:t>54</a:t>
+              <a:t>52</a:t>
             </a:fld>
             <a:endParaRPr lang="en-US"/>
           </a:p>
@@ -20831,9 +20105,9 @@
 </p:sld>
 </file>
 
-<file path=ppt/slides/slide55.xml><?xml version="1.0" encoding="utf-8"?>
+<file path=ppt/slides/slide53.xml><?xml version="1.0" encoding="utf-8"?>
 <p:sld xmlns:a="http://schemas.openxmlformats.org/drawingml/2006/main" xmlns:r="http://schemas.openxmlformats.org/officeDocument/2006/relationships" xmlns:p="http://schemas.openxmlformats.org/presentationml/2006/main">
-  <p:cSld name="Slide 55">
+  <p:cSld name="Slide 53">
     <p:spTree>
       <p:nvGrpSpPr>
         <p:cNvPr id="1" name=""/>
@@ -20928,7 +20202,7 @@
       </p:sp>
       <p:graphicFrame>
         <p:nvGraphicFramePr>
-          <p:cNvPr id="56" name="Table 0"/>
+          <p:cNvPr id="54" name="Table 0"/>
           <p:cNvGraphicFramePr>
             <a:graphicFrameLocks noGrp="1"/>
           </p:cNvGraphicFramePr>
@@ -21038,7 +20312,7 @@
                           <a:ea typeface="Calibri" pitchFamily="34" charset="-122"/>
                           <a:cs typeface="Calibri" pitchFamily="34" charset="-120"/>
                         </a:rPr>
-                        <a:t>DEFINITIONS; Meaning and Causes of Wind; Types of Planetary Winds.</a:t>
+                        <a:t>DEFINITIONS; Meaning and Illustration of Planetary Winds; Types and Characteristics of Planetary Winds.</a:t>
                       </a:r>
                       <a:endParaRPr lang="en-US" sz="1600" dirty="0">
                         <a:latin typeface="Calibri" charset="0"/>
@@ -21688,7 +20962,7 @@
             <a:pPr algn="ctr"/>
             <a:fld id="{F7021451-1387-4CA6-816F-3879F97B5CBC}" type="slidenum">
               <a:rPr b="1" lang="en-US"/>
-              <a:t>55</a:t>
+              <a:t>53</a:t>
             </a:fld>
             <a:endParaRPr lang="en-US"/>
           </a:p>
@@ -21702,9 +20976,9 @@
 </p:sld>
 </file>
 
-<file path=ppt/slides/slide56.xml><?xml version="1.0" encoding="utf-8"?>
+<file path=ppt/slides/slide54.xml><?xml version="1.0" encoding="utf-8"?>
 <p:sld xmlns:a="http://schemas.openxmlformats.org/drawingml/2006/main" xmlns:r="http://schemas.openxmlformats.org/officeDocument/2006/relationships" xmlns:p="http://schemas.openxmlformats.org/presentationml/2006/main">
-  <p:cSld name="Slide 56">
+  <p:cSld name="Slide 54">
     <p:spTree>
       <p:nvGrpSpPr>
         <p:cNvPr id="1" name=""/>
@@ -22034,7 +21308,7 @@
             <a:pPr algn="ctr"/>
             <a:fld id="{F7021451-1387-4CA6-816F-3879F97B5CBC}" type="slidenum">
               <a:rPr b="1" lang="en-US"/>
-              <a:t>56</a:t>
+              <a:t>54</a:t>
             </a:fld>
             <a:endParaRPr lang="en-US"/>
           </a:p>
@@ -22048,9 +21322,9 @@
 </p:sld>
 </file>
 
-<file path=ppt/slides/slide57.xml><?xml version="1.0" encoding="utf-8"?>
+<file path=ppt/slides/slide55.xml><?xml version="1.0" encoding="utf-8"?>
 <p:sld xmlns:a="http://schemas.openxmlformats.org/drawingml/2006/main" xmlns:r="http://schemas.openxmlformats.org/officeDocument/2006/relationships" xmlns:p="http://schemas.openxmlformats.org/presentationml/2006/main">
-  <p:cSld name="Slide 57">
+  <p:cSld name="Slide 55">
     <p:spTree>
       <p:nvGrpSpPr>
         <p:cNvPr id="1" name=""/>
@@ -22359,7 +21633,7 @@
             <a:pPr algn="ctr"/>
             <a:fld id="{F7021451-1387-4CA6-816F-3879F97B5CBC}" type="slidenum">
               <a:rPr b="1" lang="en-US"/>
-              <a:t>57</a:t>
+              <a:t>55</a:t>
             </a:fld>
             <a:endParaRPr lang="en-US"/>
           </a:p>
